--- a/tusharit/Industrial_Training_Presentation_18Sept_2026.pptx
+++ b/tusharit/Industrial_Training_Presentation_18Sept_2026.pptx
@@ -5,10 +5,10 @@
     <p:sldMasterId id="2147483648" r:id="rId1"/>
   </p:sldMasterIdLst>
   <p:notesMasterIdLst>
-    <p:notesMasterId r:id="rId25"/>
+    <p:notesMasterId r:id="rId22"/>
   </p:notesMasterIdLst>
   <p:handoutMasterIdLst>
-    <p:handoutMasterId r:id="rId26"/>
+    <p:handoutMasterId r:id="rId23"/>
   </p:handoutMasterIdLst>
   <p:sldIdLst>
     <p:sldId id="292" r:id="rId2"/>
@@ -27,13 +27,10 @@
     <p:sldId id="361" r:id="rId15"/>
     <p:sldId id="359" r:id="rId16"/>
     <p:sldId id="360" r:id="rId17"/>
-    <p:sldId id="364" r:id="rId18"/>
-    <p:sldId id="362" r:id="rId19"/>
-    <p:sldId id="363" r:id="rId20"/>
-    <p:sldId id="348" r:id="rId21"/>
-    <p:sldId id="349" r:id="rId22"/>
-    <p:sldId id="350" r:id="rId23"/>
-    <p:sldId id="341" r:id="rId24"/>
+    <p:sldId id="348" r:id="rId18"/>
+    <p:sldId id="349" r:id="rId19"/>
+    <p:sldId id="350" r:id="rId20"/>
+    <p:sldId id="341" r:id="rId21"/>
   </p:sldIdLst>
   <p:sldSz cx="10080625" cy="7559675"/>
   <p:notesSz cx="7772400" cy="10025063"/>
@@ -195,6 +192,14 @@
 </p:presentation>
 </file>
 
+<file path=ppt/revisionInfo.xml><?xml version="1.0" encoding="utf-8"?>
+<p1510:revInfo xmlns:a="http://schemas.openxmlformats.org/drawingml/2006/main" xmlns:r="http://schemas.openxmlformats.org/officeDocument/2006/relationships" xmlns:p1510="http://schemas.microsoft.com/office/powerpoint/2015/10/main">
+  <p1510:revLst>
+    <p1510:client id="{4FACE3C9-A25B-4B9D-A9B8-7072AB7ACF92}" v="5" dt="2024-11-17T14:45:03.492"/>
+  </p1510:revLst>
+</p1510:revInfo>
+</file>
+
 <file path=ppt/handoutMasters/handoutMaster1.xml><?xml version="1.0" encoding="utf-8"?>
 <p:handoutMaster xmlns:a="http://schemas.openxmlformats.org/drawingml/2006/main" xmlns:r="http://schemas.openxmlformats.org/officeDocument/2006/relationships" xmlns:p="http://schemas.openxmlformats.org/presentationml/2006/main">
   <p:cSld>
@@ -278,7 +283,7 @@
             <a:fld id="{9805B0B3-166E-4B00-A93A-02396BF50277}" type="datetimeFigureOut">
               <a:rPr lang="en-US" smtClean="0"/>
               <a:pPr/>
-              <a:t>12/1/2025</a:t>
+              <a:t>9/17/2025</a:t>
             </a:fld>
             <a:endParaRPr lang="en-US"/>
           </a:p>
@@ -1218,7 +1223,7 @@
     </p:spTree>
     <p:extLst>
       <p:ext uri="{BB962C8B-B14F-4D97-AF65-F5344CB8AC3E}">
-        <p14:creationId xmlns:p14="http://schemas.microsoft.com/office/powerpoint/2010/main" val="1618393303"/>
+        <p14:creationId xmlns:p14="http://schemas.microsoft.com/office/powerpoint/2010/main" val="1606045931"/>
       </p:ext>
     </p:extLst>
   </p:cSld>
@@ -1279,7 +1284,7 @@
     </p:spTree>
     <p:extLst>
       <p:ext uri="{BB962C8B-B14F-4D97-AF65-F5344CB8AC3E}">
-        <p14:creationId xmlns:p14="http://schemas.microsoft.com/office/powerpoint/2010/main" val="438809354"/>
+        <p14:creationId xmlns:p14="http://schemas.microsoft.com/office/powerpoint/2010/main" val="3126656851"/>
       </p:ext>
     </p:extLst>
   </p:cSld>
@@ -1340,7 +1345,7 @@
     </p:spTree>
     <p:extLst>
       <p:ext uri="{BB962C8B-B14F-4D97-AF65-F5344CB8AC3E}">
-        <p14:creationId xmlns:p14="http://schemas.microsoft.com/office/powerpoint/2010/main" val="2602982798"/>
+        <p14:creationId xmlns:p14="http://schemas.microsoft.com/office/powerpoint/2010/main" val="166528211"/>
       </p:ext>
     </p:extLst>
   </p:cSld>
@@ -1402,189 +1407,6 @@
         </p:txBody>
       </p:sp>
     </p:spTree>
-  </p:cSld>
-  <p:clrMapOvr>
-    <a:masterClrMapping/>
-  </p:clrMapOvr>
-</p:notes>
-</file>
-
-<file path=ppt/notesSlides/notesSlide20.xml><?xml version="1.0" encoding="utf-8"?>
-<p:notes xmlns:a="http://schemas.openxmlformats.org/drawingml/2006/main" xmlns:r="http://schemas.openxmlformats.org/officeDocument/2006/relationships" xmlns:p="http://schemas.openxmlformats.org/presentationml/2006/main">
-  <p:cSld>
-    <p:spTree>
-      <p:nvGrpSpPr>
-        <p:cNvPr id="1" name=""/>
-        <p:cNvGrpSpPr/>
-        <p:nvPr/>
-      </p:nvGrpSpPr>
-      <p:grpSpPr>
-        <a:xfrm>
-          <a:off x="0" y="0"/>
-          <a:ext cx="0" cy="0"/>
-          <a:chOff x="0" y="0"/>
-          <a:chExt cx="0" cy="0"/>
-        </a:xfrm>
-      </p:grpSpPr>
-      <p:sp>
-        <p:nvSpPr>
-          <p:cNvPr id="2" name="Slide Image Placeholder 1"/>
-          <p:cNvSpPr>
-            <a:spLocks noGrp="1" noRot="1" noChangeAspect="1"/>
-          </p:cNvSpPr>
-          <p:nvPr>
-            <p:ph type="sldImg"/>
-          </p:nvPr>
-        </p:nvSpPr>
-        <p:spPr/>
-      </p:sp>
-      <p:sp>
-        <p:nvSpPr>
-          <p:cNvPr id="3" name="Notes Placeholder 2"/>
-          <p:cNvSpPr>
-            <a:spLocks noGrp="1"/>
-          </p:cNvSpPr>
-          <p:nvPr>
-            <p:ph type="body" idx="1"/>
-          </p:nvPr>
-        </p:nvSpPr>
-        <p:spPr/>
-        <p:txBody>
-          <a:bodyPr/>
-          <a:lstStyle/>
-          <a:p>
-            <a:endParaRPr lang="en-IN" dirty="0"/>
-          </a:p>
-        </p:txBody>
-      </p:sp>
-    </p:spTree>
-    <p:extLst>
-      <p:ext uri="{BB962C8B-B14F-4D97-AF65-F5344CB8AC3E}">
-        <p14:creationId xmlns:p14="http://schemas.microsoft.com/office/powerpoint/2010/main" val="1606045931"/>
-      </p:ext>
-    </p:extLst>
-  </p:cSld>
-  <p:clrMapOvr>
-    <a:masterClrMapping/>
-  </p:clrMapOvr>
-</p:notes>
-</file>
-
-<file path=ppt/notesSlides/notesSlide21.xml><?xml version="1.0" encoding="utf-8"?>
-<p:notes xmlns:a="http://schemas.openxmlformats.org/drawingml/2006/main" xmlns:r="http://schemas.openxmlformats.org/officeDocument/2006/relationships" xmlns:p="http://schemas.openxmlformats.org/presentationml/2006/main">
-  <p:cSld>
-    <p:spTree>
-      <p:nvGrpSpPr>
-        <p:cNvPr id="1" name=""/>
-        <p:cNvGrpSpPr/>
-        <p:nvPr/>
-      </p:nvGrpSpPr>
-      <p:grpSpPr>
-        <a:xfrm>
-          <a:off x="0" y="0"/>
-          <a:ext cx="0" cy="0"/>
-          <a:chOff x="0" y="0"/>
-          <a:chExt cx="0" cy="0"/>
-        </a:xfrm>
-      </p:grpSpPr>
-      <p:sp>
-        <p:nvSpPr>
-          <p:cNvPr id="2" name="Slide Image Placeholder 1"/>
-          <p:cNvSpPr>
-            <a:spLocks noGrp="1" noRot="1" noChangeAspect="1"/>
-          </p:cNvSpPr>
-          <p:nvPr>
-            <p:ph type="sldImg"/>
-          </p:nvPr>
-        </p:nvSpPr>
-        <p:spPr/>
-      </p:sp>
-      <p:sp>
-        <p:nvSpPr>
-          <p:cNvPr id="3" name="Notes Placeholder 2"/>
-          <p:cNvSpPr>
-            <a:spLocks noGrp="1"/>
-          </p:cNvSpPr>
-          <p:nvPr>
-            <p:ph type="body" idx="1"/>
-          </p:nvPr>
-        </p:nvSpPr>
-        <p:spPr/>
-        <p:txBody>
-          <a:bodyPr/>
-          <a:lstStyle/>
-          <a:p>
-            <a:endParaRPr lang="en-IN" dirty="0"/>
-          </a:p>
-        </p:txBody>
-      </p:sp>
-    </p:spTree>
-    <p:extLst>
-      <p:ext uri="{BB962C8B-B14F-4D97-AF65-F5344CB8AC3E}">
-        <p14:creationId xmlns:p14="http://schemas.microsoft.com/office/powerpoint/2010/main" val="3126656851"/>
-      </p:ext>
-    </p:extLst>
-  </p:cSld>
-  <p:clrMapOvr>
-    <a:masterClrMapping/>
-  </p:clrMapOvr>
-</p:notes>
-</file>
-
-<file path=ppt/notesSlides/notesSlide22.xml><?xml version="1.0" encoding="utf-8"?>
-<p:notes xmlns:a="http://schemas.openxmlformats.org/drawingml/2006/main" xmlns:r="http://schemas.openxmlformats.org/officeDocument/2006/relationships" xmlns:p="http://schemas.openxmlformats.org/presentationml/2006/main">
-  <p:cSld>
-    <p:spTree>
-      <p:nvGrpSpPr>
-        <p:cNvPr id="1" name=""/>
-        <p:cNvGrpSpPr/>
-        <p:nvPr/>
-      </p:nvGrpSpPr>
-      <p:grpSpPr>
-        <a:xfrm>
-          <a:off x="0" y="0"/>
-          <a:ext cx="0" cy="0"/>
-          <a:chOff x="0" y="0"/>
-          <a:chExt cx="0" cy="0"/>
-        </a:xfrm>
-      </p:grpSpPr>
-      <p:sp>
-        <p:nvSpPr>
-          <p:cNvPr id="2" name="Slide Image Placeholder 1"/>
-          <p:cNvSpPr>
-            <a:spLocks noGrp="1" noRot="1" noChangeAspect="1"/>
-          </p:cNvSpPr>
-          <p:nvPr>
-            <p:ph type="sldImg"/>
-          </p:nvPr>
-        </p:nvSpPr>
-        <p:spPr/>
-      </p:sp>
-      <p:sp>
-        <p:nvSpPr>
-          <p:cNvPr id="3" name="Notes Placeholder 2"/>
-          <p:cNvSpPr>
-            <a:spLocks noGrp="1"/>
-          </p:cNvSpPr>
-          <p:nvPr>
-            <p:ph type="body" idx="1"/>
-          </p:nvPr>
-        </p:nvSpPr>
-        <p:spPr/>
-        <p:txBody>
-          <a:bodyPr/>
-          <a:lstStyle/>
-          <a:p>
-            <a:endParaRPr lang="en-IN" dirty="0"/>
-          </a:p>
-        </p:txBody>
-      </p:sp>
-    </p:spTree>
-    <p:extLst>
-      <p:ext uri="{BB962C8B-B14F-4D97-AF65-F5344CB8AC3E}">
-        <p14:creationId xmlns:p14="http://schemas.microsoft.com/office/powerpoint/2010/main" val="166528211"/>
-      </p:ext>
-    </p:extLst>
   </p:cSld>
   <p:clrMapOvr>
     <a:masterClrMapping/>
@@ -4426,7 +4248,7 @@
               <a:rPr lang="en-US" b="1" dirty="0">
                 <a:latin typeface="Helvetica" charset="0"/>
               </a:rPr>
-              <a:t>TUSHAR VAISHNAW</a:t>
+              <a:t>UTKARSH SINGH</a:t>
             </a:r>
           </a:p>
           <a:p>
@@ -4450,7 +4272,7 @@
               <a:rPr lang="en-US" b="1" dirty="0">
                 <a:latin typeface="Helvetica" charset="0"/>
               </a:rPr>
-              <a:t>22EJCIT176</a:t>
+              <a:t>22EJCIT177</a:t>
             </a:r>
           </a:p>
           <a:p>
@@ -4699,7 +4521,7 @@
         </p:nvSpPr>
         <p:spPr>
           <a:xfrm>
-            <a:off x="251780" y="1763613"/>
+            <a:off x="251780" y="1979637"/>
             <a:ext cx="9577064" cy="4975721"/>
           </a:xfrm>
           <a:prstGeom prst="rect">
@@ -4789,7 +4611,7 @@
             </a:pPr>
             <a:r>
               <a:rPr lang="en-GB" dirty="0"/>
-              <a:t>Real-time updates to the master database, responsive design, and error handling for smooth operation</a:t>
+              <a:t>Real-time updates, responsive design, and error handling for smooth operation</a:t>
             </a:r>
           </a:p>
           <a:p>
@@ -4950,6 +4772,42 @@
           <a:chExt cx="0" cy="0"/>
         </a:xfrm>
       </p:grpSpPr>
+      <p:pic>
+        <p:nvPicPr>
+          <p:cNvPr id="4" name="Picture 3" descr="A screenshot of a inventory management&#10;&#10;AI-generated content may be incorrect.">
+            <a:extLst>
+              <a:ext uri="{FF2B5EF4-FFF2-40B4-BE49-F238E27FC236}">
+                <a16:creationId xmlns:a16="http://schemas.microsoft.com/office/drawing/2014/main" id="{1F1091CD-4C8D-CF73-C685-F59EA54C8E6E}"/>
+              </a:ext>
+            </a:extLst>
+          </p:cNvPr>
+          <p:cNvPicPr>
+            <a:picLocks noChangeAspect="1"/>
+          </p:cNvPicPr>
+          <p:nvPr/>
+        </p:nvPicPr>
+        <p:blipFill>
+          <a:blip r:embed="rId3">
+            <a:extLst>
+              <a:ext uri="{28A0092B-C50C-407E-A947-70E740481C1C}">
+                <a14:useLocalDpi xmlns:a14="http://schemas.microsoft.com/office/drawing/2010/main" val="0"/>
+              </a:ext>
+            </a:extLst>
+          </a:blip>
+          <a:stretch>
+            <a:fillRect/>
+          </a:stretch>
+        </p:blipFill>
+        <p:spPr>
+          <a:xfrm>
+            <a:off x="1151880" y="1331565"/>
+            <a:ext cx="7487743" cy="6142794"/>
+          </a:xfrm>
+          <a:prstGeom prst="rect">
+            <a:avLst/>
+          </a:prstGeom>
+        </p:spPr>
+      </p:pic>
       <p:sp>
         <p:nvSpPr>
           <p:cNvPr id="6" name="TextBox 5">
@@ -4989,36 +4847,6 @@
           </a:p>
         </p:txBody>
       </p:sp>
-      <p:pic>
-        <p:nvPicPr>
-          <p:cNvPr id="5" name="Picture 4">
-            <a:extLst>
-              <a:ext uri="{FF2B5EF4-FFF2-40B4-BE49-F238E27FC236}">
-                <a16:creationId xmlns:a16="http://schemas.microsoft.com/office/drawing/2014/main" id="{322D3C55-9FBC-3E7B-E4E0-AB159839E953}"/>
-              </a:ext>
-            </a:extLst>
-          </p:cNvPr>
-          <p:cNvPicPr>
-            <a:picLocks noChangeAspect="1"/>
-          </p:cNvPicPr>
-          <p:nvPr/>
-        </p:nvPicPr>
-        <p:blipFill>
-          <a:blip r:embed="rId3"/>
-          <a:stretch>
-            <a:fillRect/>
-          </a:stretch>
-        </p:blipFill>
-        <p:spPr>
-          <a:xfrm>
-            <a:off x="-1" y="1763613"/>
-            <a:ext cx="10080625" cy="5135712"/>
-          </a:xfrm>
-          <a:prstGeom prst="rect">
-            <a:avLst/>
-          </a:prstGeom>
-        </p:spPr>
-      </p:pic>
     </p:spTree>
     <p:extLst>
       <p:ext uri="{BB962C8B-B14F-4D97-AF65-F5344CB8AC3E}">
@@ -5090,10 +4918,10 @@
       </p:sp>
       <p:pic>
         <p:nvPicPr>
-          <p:cNvPr id="2" name="Picture 1">
+          <p:cNvPr id="7" name="Picture 6">
             <a:extLst>
               <a:ext uri="{FF2B5EF4-FFF2-40B4-BE49-F238E27FC236}">
-                <a16:creationId xmlns:a16="http://schemas.microsoft.com/office/drawing/2014/main" id="{7809AD27-9A0E-F287-4E9C-A5183A63B9F9}"/>
+                <a16:creationId xmlns:a16="http://schemas.microsoft.com/office/drawing/2014/main" id="{DB0AB134-4557-E024-2F69-61774DF50549}"/>
               </a:ext>
             </a:extLst>
           </p:cNvPr>
@@ -5103,15 +4931,21 @@
           <p:nvPr/>
         </p:nvPicPr>
         <p:blipFill>
-          <a:blip r:embed="rId3"/>
+          <a:blip r:embed="rId3">
+            <a:extLst>
+              <a:ext uri="{28A0092B-C50C-407E-A947-70E740481C1C}">
+                <a14:useLocalDpi xmlns:a14="http://schemas.microsoft.com/office/drawing/2010/main" val="0"/>
+              </a:ext>
+            </a:extLst>
+          </a:blip>
           <a:stretch>
             <a:fillRect/>
           </a:stretch>
         </p:blipFill>
         <p:spPr>
           <a:xfrm>
-            <a:off x="111764" y="1612293"/>
-            <a:ext cx="9857095" cy="5544616"/>
+            <a:off x="68084" y="1835621"/>
+            <a:ext cx="9944105" cy="4526640"/>
           </a:xfrm>
           <a:prstGeom prst="rect">
             <a:avLst/>
@@ -5189,10 +5023,10 @@
       </p:sp>
       <p:pic>
         <p:nvPicPr>
-          <p:cNvPr id="2" name="Picture 1">
+          <p:cNvPr id="5" name="Picture 4">
             <a:extLst>
               <a:ext uri="{FF2B5EF4-FFF2-40B4-BE49-F238E27FC236}">
-                <a16:creationId xmlns:a16="http://schemas.microsoft.com/office/drawing/2014/main" id="{E83E7014-E848-82D4-B443-49DE5F83FCB1}"/>
+                <a16:creationId xmlns:a16="http://schemas.microsoft.com/office/drawing/2014/main" id="{1C9B1A49-5D30-484E-CF2B-2264E1512C9C}"/>
               </a:ext>
             </a:extLst>
           </p:cNvPr>
@@ -5202,15 +5036,21 @@
           <p:nvPr/>
         </p:nvPicPr>
         <p:blipFill>
-          <a:blip r:embed="rId3"/>
+          <a:blip r:embed="rId3">
+            <a:extLst>
+              <a:ext uri="{28A0092B-C50C-407E-A947-70E740481C1C}">
+                <a14:useLocalDpi xmlns:a14="http://schemas.microsoft.com/office/drawing/2010/main" val="0"/>
+              </a:ext>
+            </a:extLst>
+          </a:blip>
           <a:stretch>
             <a:fillRect/>
           </a:stretch>
         </p:blipFill>
         <p:spPr>
           <a:xfrm>
-            <a:off x="16338" y="1624730"/>
-            <a:ext cx="9904076" cy="5571043"/>
+            <a:off x="140131" y="1519561"/>
+            <a:ext cx="9868733" cy="4924571"/>
           </a:xfrm>
           <a:prstGeom prst="rect">
             <a:avLst/>
@@ -5288,10 +5128,10 @@
       </p:sp>
       <p:pic>
         <p:nvPicPr>
-          <p:cNvPr id="2" name="Picture 1">
+          <p:cNvPr id="5" name="Picture 4" descr="A screenshot of a computer&#10;&#10;AI-generated content may be incorrect.">
             <a:extLst>
               <a:ext uri="{FF2B5EF4-FFF2-40B4-BE49-F238E27FC236}">
-                <a16:creationId xmlns:a16="http://schemas.microsoft.com/office/drawing/2014/main" id="{810F9303-48BC-E611-C256-827B9D95728D}"/>
+                <a16:creationId xmlns:a16="http://schemas.microsoft.com/office/drawing/2014/main" id="{01F2ECED-2DF4-228F-47BF-A4BCB172707F}"/>
               </a:ext>
             </a:extLst>
           </p:cNvPr>
@@ -5301,15 +5141,21 @@
           <p:nvPr/>
         </p:nvPicPr>
         <p:blipFill>
-          <a:blip r:embed="rId3"/>
+          <a:blip r:embed="rId3">
+            <a:extLst>
+              <a:ext uri="{28A0092B-C50C-407E-A947-70E740481C1C}">
+                <a14:useLocalDpi xmlns:a14="http://schemas.microsoft.com/office/drawing/2010/main" val="0"/>
+              </a:ext>
+            </a:extLst>
+          </a:blip>
           <a:stretch>
             <a:fillRect/>
           </a:stretch>
         </p:blipFill>
         <p:spPr>
           <a:xfrm>
-            <a:off x="251780" y="1775538"/>
-            <a:ext cx="9577064" cy="5387099"/>
+            <a:off x="0" y="1712572"/>
+            <a:ext cx="10080625" cy="4134530"/>
           </a:xfrm>
           <a:prstGeom prst="rect">
             <a:avLst/>
@@ -5387,10 +5233,10 @@
       </p:sp>
       <p:pic>
         <p:nvPicPr>
-          <p:cNvPr id="2" name="Picture 1">
+          <p:cNvPr id="4" name="Picture 3" descr="A screenshot of a computer&#10;&#10;AI-generated content may be incorrect.">
             <a:extLst>
               <a:ext uri="{FF2B5EF4-FFF2-40B4-BE49-F238E27FC236}">
-                <a16:creationId xmlns:a16="http://schemas.microsoft.com/office/drawing/2014/main" id="{FA0BD1C5-2E95-B0C1-EC3F-47A9BBA2CA49}"/>
+                <a16:creationId xmlns:a16="http://schemas.microsoft.com/office/drawing/2014/main" id="{B87A8445-D013-AC0C-A056-05D72AD3B0DA}"/>
               </a:ext>
             </a:extLst>
           </p:cNvPr>
@@ -5400,15 +5246,21 @@
           <p:nvPr/>
         </p:nvPicPr>
         <p:blipFill>
-          <a:blip r:embed="rId3"/>
+          <a:blip r:embed="rId3">
+            <a:extLst>
+              <a:ext uri="{28A0092B-C50C-407E-A947-70E740481C1C}">
+                <a14:useLocalDpi xmlns:a14="http://schemas.microsoft.com/office/drawing/2010/main" val="0"/>
+              </a:ext>
+            </a:extLst>
+          </a:blip>
           <a:stretch>
             <a:fillRect/>
           </a:stretch>
         </p:blipFill>
         <p:spPr>
           <a:xfrm>
-            <a:off x="176082" y="1718938"/>
-            <a:ext cx="9728460" cy="5472259"/>
+            <a:off x="935856" y="1331565"/>
+            <a:ext cx="8182626" cy="6228110"/>
           </a:xfrm>
           <a:prstGeom prst="rect">
             <a:avLst/>
@@ -5486,10 +5338,10 @@
       </p:sp>
       <p:pic>
         <p:nvPicPr>
-          <p:cNvPr id="6" name="Picture 5">
+          <p:cNvPr id="4" name="Picture 3" descr="A screenshot of a computer&#10;&#10;AI-generated content may be incorrect.">
             <a:extLst>
               <a:ext uri="{FF2B5EF4-FFF2-40B4-BE49-F238E27FC236}">
-                <a16:creationId xmlns:a16="http://schemas.microsoft.com/office/drawing/2014/main" id="{C6BBD9E0-2DFB-09D6-FA0C-35EC5B3F71D7}"/>
+                <a16:creationId xmlns:a16="http://schemas.microsoft.com/office/drawing/2014/main" id="{2EF091C6-A93E-3304-089B-D83FEC4B29D0}"/>
               </a:ext>
             </a:extLst>
           </p:cNvPr>
@@ -5499,14 +5351,21 @@
           <p:nvPr/>
         </p:nvPicPr>
         <p:blipFill>
-          <a:blip r:embed="rId3"/>
-          <a:srcRect l="4998" r="4998"/>
-          <a:stretch/>
+          <a:blip r:embed="rId3">
+            <a:extLst>
+              <a:ext uri="{28A0092B-C50C-407E-A947-70E740481C1C}">
+                <a14:useLocalDpi xmlns:a14="http://schemas.microsoft.com/office/drawing/2010/main" val="0"/>
+              </a:ext>
+            </a:extLst>
+          </a:blip>
+          <a:stretch>
+            <a:fillRect/>
+          </a:stretch>
         </p:blipFill>
         <p:spPr>
           <a:xfrm>
-            <a:off x="215776" y="1619597"/>
-            <a:ext cx="9505056" cy="5408302"/>
+            <a:off x="1223888" y="1374218"/>
+            <a:ext cx="7252651" cy="6168262"/>
           </a:xfrm>
           <a:prstGeom prst="rect">
             <a:avLst/>
@@ -5527,543 +5386,6 @@
 </file>
 
 <file path=ppt/slides/slide17.xml><?xml version="1.0" encoding="utf-8"?>
-<p:sld xmlns:a="http://schemas.openxmlformats.org/drawingml/2006/main" xmlns:r="http://schemas.openxmlformats.org/officeDocument/2006/relationships" xmlns:p="http://schemas.openxmlformats.org/presentationml/2006/main">
-  <p:cSld>
-    <p:spTree>
-      <p:nvGrpSpPr>
-        <p:cNvPr id="1" name=""/>
-        <p:cNvGrpSpPr/>
-        <p:nvPr/>
-      </p:nvGrpSpPr>
-      <p:grpSpPr>
-        <a:xfrm>
-          <a:off x="0" y="0"/>
-          <a:ext cx="0" cy="0"/>
-          <a:chOff x="0" y="0"/>
-          <a:chExt cx="0" cy="0"/>
-        </a:xfrm>
-      </p:grpSpPr>
-      <p:sp>
-        <p:nvSpPr>
-          <p:cNvPr id="3" name="TextBox 2">
-            <a:extLst>
-              <a:ext uri="{FF2B5EF4-FFF2-40B4-BE49-F238E27FC236}">
-                <a16:creationId xmlns:a16="http://schemas.microsoft.com/office/drawing/2014/main" id="{12C76BE3-836B-B772-6CEB-57C12F6A8F9F}"/>
-              </a:ext>
-            </a:extLst>
-          </p:cNvPr>
-          <p:cNvSpPr txBox="1"/>
-          <p:nvPr/>
-        </p:nvSpPr>
-        <p:spPr>
-          <a:xfrm>
-            <a:off x="3528144" y="395811"/>
-            <a:ext cx="5040488" cy="646331"/>
-          </a:xfrm>
-          <a:prstGeom prst="rect">
-            <a:avLst/>
-          </a:prstGeom>
-          <a:noFill/>
-        </p:spPr>
-        <p:txBody>
-          <a:bodyPr wrap="square">
-            <a:spAutoFit/>
-          </a:bodyPr>
-          <a:lstStyle/>
-          <a:p>
-            <a:r>
-              <a:rPr lang="en-CA" sz="3600" b="1" dirty="0">
-                <a:solidFill>
-                  <a:srgbClr val="FF0000"/>
-                </a:solidFill>
-              </a:rPr>
-              <a:t>OUTPUT:</a:t>
-            </a:r>
-          </a:p>
-        </p:txBody>
-      </p:sp>
-      <p:pic>
-        <p:nvPicPr>
-          <p:cNvPr id="4" name="Picture 3">
-            <a:extLst>
-              <a:ext uri="{FF2B5EF4-FFF2-40B4-BE49-F238E27FC236}">
-                <a16:creationId xmlns:a16="http://schemas.microsoft.com/office/drawing/2014/main" id="{EEB74D9B-56AF-A66F-B299-18ACB2FB6179}"/>
-              </a:ext>
-            </a:extLst>
-          </p:cNvPr>
-          <p:cNvPicPr>
-            <a:picLocks noChangeAspect="1"/>
-          </p:cNvPicPr>
-          <p:nvPr/>
-        </p:nvPicPr>
-        <p:blipFill>
-          <a:blip r:embed="rId3"/>
-          <a:stretch>
-            <a:fillRect/>
-          </a:stretch>
-        </p:blipFill>
-        <p:spPr>
-          <a:xfrm>
-            <a:off x="303786" y="1835272"/>
-            <a:ext cx="9473052" cy="5328592"/>
-          </a:xfrm>
-          <a:prstGeom prst="rect">
-            <a:avLst/>
-          </a:prstGeom>
-        </p:spPr>
-      </p:pic>
-    </p:spTree>
-    <p:extLst>
-      <p:ext uri="{BB962C8B-B14F-4D97-AF65-F5344CB8AC3E}">
-        <p14:creationId xmlns:p14="http://schemas.microsoft.com/office/powerpoint/2010/main" val="523569615"/>
-      </p:ext>
-    </p:extLst>
-  </p:cSld>
-  <p:clrMapOvr>
-    <a:masterClrMapping/>
-  </p:clrMapOvr>
-</p:sld>
-</file>
-
-<file path=ppt/slides/slide18.xml><?xml version="1.0" encoding="utf-8"?>
-<p:sld xmlns:a="http://schemas.openxmlformats.org/drawingml/2006/main" xmlns:r="http://schemas.openxmlformats.org/officeDocument/2006/relationships" xmlns:p="http://schemas.openxmlformats.org/presentationml/2006/main">
-  <p:cSld>
-    <p:spTree>
-      <p:nvGrpSpPr>
-        <p:cNvPr id="1" name=""/>
-        <p:cNvGrpSpPr/>
-        <p:nvPr/>
-      </p:nvGrpSpPr>
-      <p:grpSpPr>
-        <a:xfrm>
-          <a:off x="0" y="0"/>
-          <a:ext cx="0" cy="0"/>
-          <a:chOff x="0" y="0"/>
-          <a:chExt cx="0" cy="0"/>
-        </a:xfrm>
-      </p:grpSpPr>
-      <p:sp>
-        <p:nvSpPr>
-          <p:cNvPr id="3" name="TextBox 2">
-            <a:extLst>
-              <a:ext uri="{FF2B5EF4-FFF2-40B4-BE49-F238E27FC236}">
-                <a16:creationId xmlns:a16="http://schemas.microsoft.com/office/drawing/2014/main" id="{12C76BE3-836B-B772-6CEB-57C12F6A8F9F}"/>
-              </a:ext>
-            </a:extLst>
-          </p:cNvPr>
-          <p:cNvSpPr txBox="1"/>
-          <p:nvPr/>
-        </p:nvSpPr>
-        <p:spPr>
-          <a:xfrm>
-            <a:off x="3528144" y="395811"/>
-            <a:ext cx="5040488" cy="646331"/>
-          </a:xfrm>
-          <a:prstGeom prst="rect">
-            <a:avLst/>
-          </a:prstGeom>
-          <a:noFill/>
-        </p:spPr>
-        <p:txBody>
-          <a:bodyPr wrap="square">
-            <a:spAutoFit/>
-          </a:bodyPr>
-          <a:lstStyle/>
-          <a:p>
-            <a:r>
-              <a:rPr lang="en-CA" sz="3600" b="1" dirty="0">
-                <a:solidFill>
-                  <a:srgbClr val="FF0000"/>
-                </a:solidFill>
-              </a:rPr>
-              <a:t>OUTPUT:</a:t>
-            </a:r>
-          </a:p>
-        </p:txBody>
-      </p:sp>
-      <p:pic>
-        <p:nvPicPr>
-          <p:cNvPr id="4" name="Picture 3">
-            <a:extLst>
-              <a:ext uri="{FF2B5EF4-FFF2-40B4-BE49-F238E27FC236}">
-                <a16:creationId xmlns:a16="http://schemas.microsoft.com/office/drawing/2014/main" id="{D2EB18B7-D00D-26C5-B3B7-4FFF70735B22}"/>
-              </a:ext>
-            </a:extLst>
-          </p:cNvPr>
-          <p:cNvPicPr>
-            <a:picLocks noChangeAspect="1"/>
-          </p:cNvPicPr>
-          <p:nvPr/>
-        </p:nvPicPr>
-        <p:blipFill>
-          <a:blip r:embed="rId3"/>
-          <a:stretch>
-            <a:fillRect/>
-          </a:stretch>
-        </p:blipFill>
-        <p:spPr>
-          <a:xfrm>
-            <a:off x="359792" y="1619597"/>
-            <a:ext cx="9345038" cy="5256584"/>
-          </a:xfrm>
-          <a:prstGeom prst="rect">
-            <a:avLst/>
-          </a:prstGeom>
-        </p:spPr>
-      </p:pic>
-    </p:spTree>
-    <p:extLst>
-      <p:ext uri="{BB962C8B-B14F-4D97-AF65-F5344CB8AC3E}">
-        <p14:creationId xmlns:p14="http://schemas.microsoft.com/office/powerpoint/2010/main" val="1451492639"/>
-      </p:ext>
-    </p:extLst>
-  </p:cSld>
-  <p:clrMapOvr>
-    <a:masterClrMapping/>
-  </p:clrMapOvr>
-</p:sld>
-</file>
-
-<file path=ppt/slides/slide19.xml><?xml version="1.0" encoding="utf-8"?>
-<p:sld xmlns:a="http://schemas.openxmlformats.org/drawingml/2006/main" xmlns:r="http://schemas.openxmlformats.org/officeDocument/2006/relationships" xmlns:p="http://schemas.openxmlformats.org/presentationml/2006/main">
-  <p:cSld>
-    <p:spTree>
-      <p:nvGrpSpPr>
-        <p:cNvPr id="1" name=""/>
-        <p:cNvGrpSpPr/>
-        <p:nvPr/>
-      </p:nvGrpSpPr>
-      <p:grpSpPr>
-        <a:xfrm>
-          <a:off x="0" y="0"/>
-          <a:ext cx="0" cy="0"/>
-          <a:chOff x="0" y="0"/>
-          <a:chExt cx="0" cy="0"/>
-        </a:xfrm>
-      </p:grpSpPr>
-      <p:sp>
-        <p:nvSpPr>
-          <p:cNvPr id="3" name="TextBox 2">
-            <a:extLst>
-              <a:ext uri="{FF2B5EF4-FFF2-40B4-BE49-F238E27FC236}">
-                <a16:creationId xmlns:a16="http://schemas.microsoft.com/office/drawing/2014/main" id="{12C76BE3-836B-B772-6CEB-57C12F6A8F9F}"/>
-              </a:ext>
-            </a:extLst>
-          </p:cNvPr>
-          <p:cNvSpPr txBox="1"/>
-          <p:nvPr/>
-        </p:nvSpPr>
-        <p:spPr>
-          <a:xfrm>
-            <a:off x="3528144" y="395811"/>
-            <a:ext cx="5040488" cy="646331"/>
-          </a:xfrm>
-          <a:prstGeom prst="rect">
-            <a:avLst/>
-          </a:prstGeom>
-          <a:noFill/>
-        </p:spPr>
-        <p:txBody>
-          <a:bodyPr wrap="square">
-            <a:spAutoFit/>
-          </a:bodyPr>
-          <a:lstStyle/>
-          <a:p>
-            <a:r>
-              <a:rPr lang="en-CA" sz="3600" b="1" dirty="0">
-                <a:solidFill>
-                  <a:srgbClr val="FF0000"/>
-                </a:solidFill>
-              </a:rPr>
-              <a:t>OUTPUT:</a:t>
-            </a:r>
-          </a:p>
-        </p:txBody>
-      </p:sp>
-      <p:pic>
-        <p:nvPicPr>
-          <p:cNvPr id="4" name="Picture 3">
-            <a:extLst>
-              <a:ext uri="{FF2B5EF4-FFF2-40B4-BE49-F238E27FC236}">
-                <a16:creationId xmlns:a16="http://schemas.microsoft.com/office/drawing/2014/main" id="{EEB74D9B-56AF-A66F-B299-18ACB2FB6179}"/>
-              </a:ext>
-            </a:extLst>
-          </p:cNvPr>
-          <p:cNvPicPr>
-            <a:picLocks noChangeAspect="1"/>
-          </p:cNvPicPr>
-          <p:nvPr/>
-        </p:nvPicPr>
-        <p:blipFill>
-          <a:blip r:embed="rId3"/>
-          <a:stretch>
-            <a:fillRect/>
-          </a:stretch>
-        </p:blipFill>
-        <p:spPr>
-          <a:xfrm>
-            <a:off x="303786" y="1835272"/>
-            <a:ext cx="9473052" cy="5328592"/>
-          </a:xfrm>
-          <a:prstGeom prst="rect">
-            <a:avLst/>
-          </a:prstGeom>
-        </p:spPr>
-      </p:pic>
-    </p:spTree>
-    <p:extLst>
-      <p:ext uri="{BB962C8B-B14F-4D97-AF65-F5344CB8AC3E}">
-        <p14:creationId xmlns:p14="http://schemas.microsoft.com/office/powerpoint/2010/main" val="4080477839"/>
-      </p:ext>
-    </p:extLst>
-  </p:cSld>
-  <p:clrMapOvr>
-    <a:masterClrMapping/>
-  </p:clrMapOvr>
-</p:sld>
-</file>
-
-<file path=ppt/slides/slide2.xml><?xml version="1.0" encoding="utf-8"?>
-<p:sld xmlns:a="http://schemas.openxmlformats.org/drawingml/2006/main" xmlns:r="http://schemas.openxmlformats.org/officeDocument/2006/relationships" xmlns:p="http://schemas.openxmlformats.org/presentationml/2006/main" showMasterSp="0">
-  <p:cSld>
-    <p:spTree>
-      <p:nvGrpSpPr>
-        <p:cNvPr id="1" name=""/>
-        <p:cNvGrpSpPr/>
-        <p:nvPr/>
-      </p:nvGrpSpPr>
-      <p:grpSpPr>
-        <a:xfrm>
-          <a:off x="0" y="0"/>
-          <a:ext cx="0" cy="0"/>
-          <a:chOff x="0" y="0"/>
-          <a:chExt cx="0" cy="0"/>
-        </a:xfrm>
-      </p:grpSpPr>
-      <p:sp>
-        <p:nvSpPr>
-          <p:cNvPr id="3" name="TextBox 2">
-            <a:extLst>
-              <a:ext uri="{FF2B5EF4-FFF2-40B4-BE49-F238E27FC236}">
-                <a16:creationId xmlns:a16="http://schemas.microsoft.com/office/drawing/2014/main" id="{D6FD5E44-218A-915C-5A11-DE7A256B9546}"/>
-              </a:ext>
-            </a:extLst>
-          </p:cNvPr>
-          <p:cNvSpPr txBox="1"/>
-          <p:nvPr/>
-        </p:nvSpPr>
-        <p:spPr>
-          <a:xfrm>
-            <a:off x="431800" y="1583006"/>
-            <a:ext cx="7920880" cy="5509200"/>
-          </a:xfrm>
-          <a:prstGeom prst="rect">
-            <a:avLst/>
-          </a:prstGeom>
-          <a:noFill/>
-        </p:spPr>
-        <p:txBody>
-          <a:bodyPr wrap="square">
-            <a:spAutoFit/>
-          </a:bodyPr>
-          <a:lstStyle/>
-          <a:p>
-            <a:pPr algn="l" rtl="0" fontAlgn="base">
-              <a:spcBef>
-                <a:spcPts val="0"/>
-              </a:spcBef>
-              <a:spcAft>
-                <a:spcPts val="0"/>
-              </a:spcAft>
-            </a:pPr>
-            <a:r>
-              <a:rPr lang="en-US" sz="3200" b="1" i="0" dirty="0">
-                <a:effectLst/>
-                <a:latin typeface="Arial" panose="020B0604020202020204" pitchFamily="34" charset="0"/>
-              </a:rPr>
-              <a:t>1. Introduction/Abstract</a:t>
-            </a:r>
-            <a:br>
-              <a:rPr lang="en-US" sz="3200" b="1" i="0" dirty="0">
-                <a:effectLst/>
-                <a:latin typeface="Arial" panose="020B0604020202020204" pitchFamily="34" charset="0"/>
-              </a:rPr>
-            </a:br>
-            <a:r>
-              <a:rPr lang="en-US" sz="3200" b="1" i="0" dirty="0">
-                <a:effectLst/>
-                <a:latin typeface="Arial" panose="020B0604020202020204" pitchFamily="34" charset="0"/>
-              </a:rPr>
-              <a:t>2. Company/Organization details</a:t>
-            </a:r>
-            <a:br>
-              <a:rPr lang="en-US" sz="3200" b="1" i="0" dirty="0">
-                <a:effectLst/>
-                <a:latin typeface="Arial" panose="020B0604020202020204" pitchFamily="34" charset="0"/>
-              </a:rPr>
-            </a:br>
-            <a:r>
-              <a:rPr lang="en-US" sz="3200" b="1" i="0" dirty="0">
-                <a:effectLst/>
-                <a:latin typeface="Arial" panose="020B0604020202020204" pitchFamily="34" charset="0"/>
-              </a:rPr>
-              <a:t>3. Certificate</a:t>
-            </a:r>
-            <a:br>
-              <a:rPr lang="en-US" sz="3200" b="1" i="0" dirty="0">
-                <a:effectLst/>
-                <a:latin typeface="Arial" panose="020B0604020202020204" pitchFamily="34" charset="0"/>
-              </a:rPr>
-            </a:br>
-            <a:r>
-              <a:rPr lang="en-US" sz="3200" b="1" i="0" dirty="0">
-                <a:effectLst/>
-                <a:latin typeface="Arial" panose="020B0604020202020204" pitchFamily="34" charset="0"/>
-              </a:rPr>
-              <a:t>4. Technology Name-Detailed  Description</a:t>
-            </a:r>
-            <a:br>
-              <a:rPr lang="en-US" sz="3200" b="1" i="0" dirty="0">
-                <a:effectLst/>
-                <a:latin typeface="Arial" panose="020B0604020202020204" pitchFamily="34" charset="0"/>
-              </a:rPr>
-            </a:br>
-            <a:r>
-              <a:rPr lang="en-US" sz="3200" b="1" i="0" dirty="0">
-                <a:effectLst/>
-                <a:latin typeface="Arial" panose="020B0604020202020204" pitchFamily="34" charset="0"/>
-              </a:rPr>
-              <a:t>5. Project Description</a:t>
-            </a:r>
-            <a:br>
-              <a:rPr lang="en-US" sz="3200" b="1" i="0" dirty="0">
-                <a:effectLst/>
-                <a:latin typeface="Arial" panose="020B0604020202020204" pitchFamily="34" charset="0"/>
-              </a:rPr>
-            </a:br>
-            <a:r>
-              <a:rPr lang="en-US" sz="3200" b="1" i="0" dirty="0">
-                <a:effectLst/>
-                <a:latin typeface="Arial" panose="020B0604020202020204" pitchFamily="34" charset="0"/>
-              </a:rPr>
-              <a:t>6. Screenshots of Project</a:t>
-            </a:r>
-            <a:br>
-              <a:rPr lang="en-US" sz="3200" b="1" i="0" dirty="0">
-                <a:effectLst/>
-                <a:latin typeface="Arial" panose="020B0604020202020204" pitchFamily="34" charset="0"/>
-              </a:rPr>
-            </a:br>
-            <a:r>
-              <a:rPr lang="en-US" sz="3200" b="1" i="0" dirty="0">
-                <a:effectLst/>
-                <a:latin typeface="Arial" panose="020B0604020202020204" pitchFamily="34" charset="0"/>
-              </a:rPr>
-              <a:t>7. Conclusion</a:t>
-            </a:r>
-            <a:br>
-              <a:rPr lang="en-US" sz="3200" b="1" i="0" dirty="0">
-                <a:effectLst/>
-                <a:latin typeface="Arial" panose="020B0604020202020204" pitchFamily="34" charset="0"/>
-              </a:rPr>
-            </a:br>
-            <a:r>
-              <a:rPr lang="en-US" sz="3200" b="1" i="0" dirty="0">
-                <a:effectLst/>
-                <a:latin typeface="Arial" panose="020B0604020202020204" pitchFamily="34" charset="0"/>
-              </a:rPr>
-              <a:t>8. Future Scope</a:t>
-            </a:r>
-          </a:p>
-          <a:p>
-            <a:pPr algn="l" rtl="0" fontAlgn="base">
-              <a:spcBef>
-                <a:spcPts val="0"/>
-              </a:spcBef>
-              <a:spcAft>
-                <a:spcPts val="0"/>
-              </a:spcAft>
-            </a:pPr>
-            <a:r>
-              <a:rPr lang="en-US" sz="3200" b="1" dirty="0">
-                <a:latin typeface="Arial" panose="020B0604020202020204" pitchFamily="34" charset="0"/>
-              </a:rPr>
-              <a:t>9</a:t>
-            </a:r>
-            <a:r>
-              <a:rPr lang="en-US" sz="3200" b="1" i="0" dirty="0">
-                <a:effectLst/>
-                <a:latin typeface="Arial" panose="020B0604020202020204" pitchFamily="34" charset="0"/>
-              </a:rPr>
-              <a:t>. References</a:t>
-            </a:r>
-            <a:br>
-              <a:rPr lang="en-US" sz="3200" b="1" i="0" dirty="0">
-                <a:effectLst/>
-                <a:latin typeface="Arial" panose="020B0604020202020204" pitchFamily="34" charset="0"/>
-              </a:rPr>
-            </a:br>
-            <a:endParaRPr lang="en-US" sz="3200" b="1" i="0" dirty="0">
-              <a:effectLst/>
-              <a:latin typeface="Arial" panose="020B0604020202020204" pitchFamily="34" charset="0"/>
-            </a:endParaRPr>
-          </a:p>
-        </p:txBody>
-      </p:sp>
-      <p:sp>
-        <p:nvSpPr>
-          <p:cNvPr id="5" name="TextBox 4">
-            <a:extLst>
-              <a:ext uri="{FF2B5EF4-FFF2-40B4-BE49-F238E27FC236}">
-                <a16:creationId xmlns:a16="http://schemas.microsoft.com/office/drawing/2014/main" id="{5B36D36D-2B4C-5512-72F1-EEF60EF4272A}"/>
-              </a:ext>
-            </a:extLst>
-          </p:cNvPr>
-          <p:cNvSpPr txBox="1"/>
-          <p:nvPr/>
-        </p:nvSpPr>
-        <p:spPr>
-          <a:xfrm>
-            <a:off x="3672160" y="467469"/>
-            <a:ext cx="5040488" cy="646331"/>
-          </a:xfrm>
-          <a:prstGeom prst="rect">
-            <a:avLst/>
-          </a:prstGeom>
-          <a:noFill/>
-        </p:spPr>
-        <p:txBody>
-          <a:bodyPr wrap="square">
-            <a:spAutoFit/>
-          </a:bodyPr>
-          <a:lstStyle/>
-          <a:p>
-            <a:r>
-              <a:rPr lang="en-GB" sz="3600" b="1" dirty="0">
-                <a:solidFill>
-                  <a:srgbClr val="FF0000"/>
-                </a:solidFill>
-              </a:rPr>
-              <a:t>Contents</a:t>
-            </a:r>
-            <a:endParaRPr lang="en-CA" sz="3600" b="1" dirty="0">
-              <a:solidFill>
-                <a:srgbClr val="FF0000"/>
-              </a:solidFill>
-            </a:endParaRPr>
-          </a:p>
-        </p:txBody>
-      </p:sp>
-    </p:spTree>
-  </p:cSld>
-  <p:clrMapOvr>
-    <a:masterClrMapping/>
-  </p:clrMapOvr>
-  <p:transition/>
-</p:sld>
-</file>
-
-<file path=ppt/slides/slide20.xml><?xml version="1.0" encoding="utf-8"?>
 <p:sld xmlns:a="http://schemas.openxmlformats.org/drawingml/2006/main" xmlns:r="http://schemas.openxmlformats.org/officeDocument/2006/relationships" xmlns:p="http://schemas.openxmlformats.org/presentationml/2006/main">
   <p:cSld>
     <p:spTree>
@@ -6217,7 +5539,7 @@
 </p:sld>
 </file>
 
-<file path=ppt/slides/slide21.xml><?xml version="1.0" encoding="utf-8"?>
+<file path=ppt/slides/slide18.xml><?xml version="1.0" encoding="utf-8"?>
 <p:sld xmlns:a="http://schemas.openxmlformats.org/drawingml/2006/main" xmlns:r="http://schemas.openxmlformats.org/officeDocument/2006/relationships" xmlns:p="http://schemas.openxmlformats.org/presentationml/2006/main">
   <p:cSld>
     <p:spTree>
@@ -6391,7 +5713,7 @@
 </p:sld>
 </file>
 
-<file path=ppt/slides/slide22.xml><?xml version="1.0" encoding="utf-8"?>
+<file path=ppt/slides/slide19.xml><?xml version="1.0" encoding="utf-8"?>
 <p:sld xmlns:a="http://schemas.openxmlformats.org/drawingml/2006/main" xmlns:r="http://schemas.openxmlformats.org/officeDocument/2006/relationships" xmlns:p="http://schemas.openxmlformats.org/presentationml/2006/main">
   <p:cSld>
     <p:spTree>
@@ -6905,7 +6227,254 @@
 </p:sld>
 </file>
 
-<file path=ppt/slides/slide23.xml><?xml version="1.0" encoding="utf-8"?>
+<file path=ppt/slides/slide2.xml><?xml version="1.0" encoding="utf-8"?>
+<p:sld xmlns:a="http://schemas.openxmlformats.org/drawingml/2006/main" xmlns:r="http://schemas.openxmlformats.org/officeDocument/2006/relationships" xmlns:p="http://schemas.openxmlformats.org/presentationml/2006/main" showMasterSp="0">
+  <p:cSld>
+    <p:spTree>
+      <p:nvGrpSpPr>
+        <p:cNvPr id="1" name=""/>
+        <p:cNvGrpSpPr/>
+        <p:nvPr/>
+      </p:nvGrpSpPr>
+      <p:grpSpPr>
+        <a:xfrm>
+          <a:off x="0" y="0"/>
+          <a:ext cx="0" cy="0"/>
+          <a:chOff x="0" y="0"/>
+          <a:chExt cx="0" cy="0"/>
+        </a:xfrm>
+      </p:grpSpPr>
+      <p:sp>
+        <p:nvSpPr>
+          <p:cNvPr id="3" name="TextBox 2">
+            <a:extLst>
+              <a:ext uri="{FF2B5EF4-FFF2-40B4-BE49-F238E27FC236}">
+                <a16:creationId xmlns:a16="http://schemas.microsoft.com/office/drawing/2014/main" id="{D6FD5E44-218A-915C-5A11-DE7A256B9546}"/>
+              </a:ext>
+            </a:extLst>
+          </p:cNvPr>
+          <p:cNvSpPr txBox="1"/>
+          <p:nvPr/>
+        </p:nvSpPr>
+        <p:spPr>
+          <a:xfrm>
+            <a:off x="647824" y="1850904"/>
+            <a:ext cx="7920880" cy="4401205"/>
+          </a:xfrm>
+          <a:prstGeom prst="rect">
+            <a:avLst/>
+          </a:prstGeom>
+          <a:noFill/>
+        </p:spPr>
+        <p:txBody>
+          <a:bodyPr wrap="square">
+            <a:spAutoFit/>
+          </a:bodyPr>
+          <a:lstStyle/>
+          <a:p>
+            <a:pPr algn="l" rtl="0" fontAlgn="base">
+              <a:spcBef>
+                <a:spcPts val="0"/>
+              </a:spcBef>
+              <a:spcAft>
+                <a:spcPts val="0"/>
+              </a:spcAft>
+            </a:pPr>
+            <a:r>
+              <a:rPr lang="en-US" sz="2800" b="1" i="0" dirty="0">
+                <a:effectLst/>
+                <a:latin typeface="Arial" panose="020B0604020202020204" pitchFamily="34" charset="0"/>
+              </a:rPr>
+              <a:t>1. Introduction/Abstract</a:t>
+            </a:r>
+            <a:br>
+              <a:rPr lang="en-US" sz="2800" b="1" i="0" dirty="0">
+                <a:effectLst/>
+                <a:latin typeface="Arial" panose="020B0604020202020204" pitchFamily="34" charset="0"/>
+              </a:rPr>
+            </a:br>
+            <a:r>
+              <a:rPr lang="en-US" sz="2800" b="1" i="0" dirty="0">
+                <a:effectLst/>
+                <a:latin typeface="Arial" panose="020B0604020202020204" pitchFamily="34" charset="0"/>
+              </a:rPr>
+              <a:t>2. Company/Organization details</a:t>
+            </a:r>
+            <a:br>
+              <a:rPr lang="en-US" sz="2800" b="1" i="0" dirty="0">
+                <a:effectLst/>
+                <a:latin typeface="Arial" panose="020B0604020202020204" pitchFamily="34" charset="0"/>
+              </a:rPr>
+            </a:br>
+            <a:r>
+              <a:rPr lang="en-US" sz="2800" b="1" i="0" dirty="0">
+                <a:effectLst/>
+                <a:latin typeface="Arial" panose="020B0604020202020204" pitchFamily="34" charset="0"/>
+              </a:rPr>
+              <a:t>3. Certificate</a:t>
+            </a:r>
+            <a:br>
+              <a:rPr lang="en-US" sz="2800" b="1" i="0" dirty="0">
+                <a:effectLst/>
+                <a:latin typeface="Arial" panose="020B0604020202020204" pitchFamily="34" charset="0"/>
+              </a:rPr>
+            </a:br>
+            <a:r>
+              <a:rPr lang="en-US" sz="2800" b="1" i="0" dirty="0">
+                <a:effectLst/>
+                <a:latin typeface="Arial" panose="020B0604020202020204" pitchFamily="34" charset="0"/>
+              </a:rPr>
+              <a:t>4. Technology Name-Detailed  Description</a:t>
+            </a:r>
+            <a:br>
+              <a:rPr lang="en-US" sz="2800" b="1" i="0" dirty="0">
+                <a:effectLst/>
+                <a:latin typeface="Arial" panose="020B0604020202020204" pitchFamily="34" charset="0"/>
+              </a:rPr>
+            </a:br>
+            <a:r>
+              <a:rPr lang="en-US" sz="2800" b="1" i="0" dirty="0">
+                <a:effectLst/>
+                <a:latin typeface="Arial" panose="020B0604020202020204" pitchFamily="34" charset="0"/>
+              </a:rPr>
+              <a:t>5. Project Description</a:t>
+            </a:r>
+            <a:br>
+              <a:rPr lang="en-US" sz="2800" b="1" i="0" dirty="0">
+                <a:effectLst/>
+                <a:latin typeface="Arial" panose="020B0604020202020204" pitchFamily="34" charset="0"/>
+              </a:rPr>
+            </a:br>
+            <a:r>
+              <a:rPr lang="en-US" sz="2800" b="1" i="0" dirty="0">
+                <a:effectLst/>
+                <a:latin typeface="Arial" panose="020B0604020202020204" pitchFamily="34" charset="0"/>
+              </a:rPr>
+              <a:t>6. Screenshots of Project</a:t>
+            </a:r>
+            <a:br>
+              <a:rPr lang="en-US" sz="2800" b="1" i="0" dirty="0">
+                <a:effectLst/>
+                <a:latin typeface="Arial" panose="020B0604020202020204" pitchFamily="34" charset="0"/>
+              </a:rPr>
+            </a:br>
+            <a:r>
+              <a:rPr lang="en-US" sz="2800" b="1" i="0" dirty="0">
+                <a:effectLst/>
+                <a:latin typeface="Arial" panose="020B0604020202020204" pitchFamily="34" charset="0"/>
+              </a:rPr>
+              <a:t>7. Conclusion</a:t>
+            </a:r>
+            <a:br>
+              <a:rPr lang="en-US" sz="2800" b="1" i="0" dirty="0">
+                <a:effectLst/>
+                <a:latin typeface="Arial" panose="020B0604020202020204" pitchFamily="34" charset="0"/>
+              </a:rPr>
+            </a:br>
+            <a:r>
+              <a:rPr lang="en-US" sz="2800" b="1" i="0" dirty="0">
+                <a:effectLst/>
+                <a:latin typeface="Arial" panose="020B0604020202020204" pitchFamily="34" charset="0"/>
+              </a:rPr>
+              <a:t>8. Future Scope</a:t>
+            </a:r>
+          </a:p>
+          <a:p>
+            <a:pPr algn="l" rtl="0" fontAlgn="base">
+              <a:spcBef>
+                <a:spcPts val="0"/>
+              </a:spcBef>
+              <a:spcAft>
+                <a:spcPts val="0"/>
+              </a:spcAft>
+            </a:pPr>
+            <a:r>
+              <a:rPr lang="en-US" sz="2800" b="1">
+                <a:latin typeface="Arial" panose="020B0604020202020204" pitchFamily="34" charset="0"/>
+              </a:rPr>
+              <a:t>9</a:t>
+            </a:r>
+            <a:r>
+              <a:rPr lang="en-US" sz="2800" b="1" i="0">
+                <a:effectLst/>
+                <a:latin typeface="Arial" panose="020B0604020202020204" pitchFamily="34" charset="0"/>
+              </a:rPr>
+              <a:t>. </a:t>
+            </a:r>
+            <a:r>
+              <a:rPr lang="en-US" sz="2800" b="1" i="0" dirty="0">
+                <a:effectLst/>
+                <a:latin typeface="Arial" panose="020B0604020202020204" pitchFamily="34" charset="0"/>
+              </a:rPr>
+              <a:t>References</a:t>
+            </a:r>
+            <a:br>
+              <a:rPr lang="en-US" sz="2800" b="1" i="0" dirty="0">
+                <a:effectLst/>
+                <a:latin typeface="Arial" panose="020B0604020202020204" pitchFamily="34" charset="0"/>
+              </a:rPr>
+            </a:br>
+            <a:endParaRPr lang="en-US" sz="2800" b="1" i="0" dirty="0">
+              <a:effectLst/>
+              <a:latin typeface="Arial" panose="020B0604020202020204" pitchFamily="34" charset="0"/>
+            </a:endParaRPr>
+          </a:p>
+        </p:txBody>
+      </p:sp>
+      <p:sp>
+        <p:nvSpPr>
+          <p:cNvPr id="5" name="TextBox 4">
+            <a:extLst>
+              <a:ext uri="{FF2B5EF4-FFF2-40B4-BE49-F238E27FC236}">
+                <a16:creationId xmlns:a16="http://schemas.microsoft.com/office/drawing/2014/main" id="{5B36D36D-2B4C-5512-72F1-EEF60EF4272A}"/>
+              </a:ext>
+            </a:extLst>
+          </p:cNvPr>
+          <p:cNvSpPr txBox="1"/>
+          <p:nvPr/>
+        </p:nvSpPr>
+        <p:spPr>
+          <a:xfrm>
+            <a:off x="3672160" y="467469"/>
+            <a:ext cx="5040488" cy="646331"/>
+          </a:xfrm>
+          <a:prstGeom prst="rect">
+            <a:avLst/>
+          </a:prstGeom>
+          <a:noFill/>
+        </p:spPr>
+        <p:txBody>
+          <a:bodyPr wrap="square">
+            <a:spAutoFit/>
+          </a:bodyPr>
+          <a:lstStyle/>
+          <a:p>
+            <a:r>
+              <a:rPr lang="en-GB" sz="3600" b="1" dirty="0">
+                <a:solidFill>
+                  <a:srgbClr val="FF0000"/>
+                </a:solidFill>
+              </a:rPr>
+              <a:t>Contents</a:t>
+            </a:r>
+            <a:endParaRPr lang="en-CA" sz="3600" b="1" dirty="0">
+              <a:solidFill>
+                <a:srgbClr val="FF0000"/>
+              </a:solidFill>
+            </a:endParaRPr>
+          </a:p>
+        </p:txBody>
+      </p:sp>
+    </p:spTree>
+  </p:cSld>
+  <p:clrMapOvr>
+    <a:masterClrMapping/>
+  </p:clrMapOvr>
+  <p:transition/>
+</p:sld>
+</file>
+
+<file path=ppt/slides/slide20.xml><?xml version="1.0" encoding="utf-8"?>
 <p:sld xmlns:a="http://schemas.openxmlformats.org/drawingml/2006/main" xmlns:r="http://schemas.openxmlformats.org/officeDocument/2006/relationships" xmlns:p="http://schemas.openxmlformats.org/presentationml/2006/main">
   <p:cSld>
     <p:spTree>
@@ -7005,7 +6574,7 @@
         </p:nvSpPr>
         <p:spPr>
           <a:xfrm>
-            <a:off x="2087984" y="467469"/>
+            <a:off x="2376016" y="467469"/>
             <a:ext cx="5040488" cy="646331"/>
           </a:xfrm>
           <a:prstGeom prst="rect">
@@ -8568,10 +8137,10 @@
       </p:sp>
       <p:pic>
         <p:nvPicPr>
-          <p:cNvPr id="8" name="Picture 7" descr="A certificate of internship&#10;&#10;AI-generated content may be incorrect.">
+          <p:cNvPr id="4" name="Picture 3">
             <a:extLst>
               <a:ext uri="{FF2B5EF4-FFF2-40B4-BE49-F238E27FC236}">
-                <a16:creationId xmlns:a16="http://schemas.microsoft.com/office/drawing/2014/main" id="{588F5C6B-564D-3DC0-C437-E639488367F5}"/>
+                <a16:creationId xmlns:a16="http://schemas.microsoft.com/office/drawing/2014/main" id="{6B65401C-FA98-0A19-0310-4A93D399C6E0}"/>
               </a:ext>
             </a:extLst>
           </p:cNvPr>
@@ -8594,8 +8163,8 @@
         </p:blipFill>
         <p:spPr>
           <a:xfrm>
-            <a:off x="503808" y="1331565"/>
-            <a:ext cx="8712968" cy="6166802"/>
+            <a:off x="921729" y="1475581"/>
+            <a:ext cx="8237166" cy="5879276"/>
           </a:xfrm>
           <a:prstGeom prst="rect">
             <a:avLst/>
@@ -9451,7 +9020,7 @@
         </p:nvSpPr>
         <p:spPr>
           <a:xfrm>
-            <a:off x="251780" y="1547589"/>
+            <a:off x="251780" y="1619597"/>
             <a:ext cx="9577064" cy="5298886"/>
           </a:xfrm>
           <a:prstGeom prst="rect">
@@ -9598,8 +9167,20 @@
               <a:t>Cloud-hosted solution deployed on </a:t>
             </a:r>
             <a:r>
+              <a:rPr lang="en-GB" b="1" dirty="0" err="1"/>
+              <a:t>Vercel</a:t>
+            </a:r>
+            <a:r>
               <a:rPr lang="en-GB" b="1" dirty="0"/>
-              <a:t>Render (both frontend and backend)</a:t>
+              <a:t> (frontend)</a:t>
+            </a:r>
+            <a:r>
+              <a:rPr lang="en-GB" dirty="0"/>
+              <a:t> and </a:t>
+            </a:r>
+            <a:r>
+              <a:rPr lang="en-GB" b="1" dirty="0"/>
+              <a:t>Render (backend)</a:t>
             </a:r>
             <a:r>
               <a:rPr lang="en-GB" dirty="0"/>
